--- a/地端AI建置實作-RAG.pptx
+++ b/地端AI建置實作-RAG.pptx
@@ -46,7 +46,7 @@
     <p:sldId id="291" r:id="rId37"/>
     <p:sldId id="292" r:id="rId38"/>
     <p:sldId id="293" r:id="rId39"/>
-    <p:sldId id="295" r:id="rId40"/>
+    <p:sldId id="294" r:id="rId40"/>
   </p:sldIdLst>
   <p:sldSz cx="12192000" cy="6858000"/>
   <p:notesSz cx="6858000" cy="9144000"/>
@@ -7718,7 +7718,7 @@
               </a:defRPr>
             </a:pPr>
             <a:r>
-              <a:rPr sz="3900" b="1">
+              <a:rPr sz="5400" b="1" dirty="0" err="1">
                 <a:solidFill>
                   <a:srgbClr val="FFFFFF"/>
                 </a:solidFill>
@@ -7726,7 +7726,18 @@
                 <a:ea typeface="Microsoft JhengHei"/>
                 <a:cs typeface="Microsoft JhengHei"/>
               </a:rPr>
-              <a:t>讓本機 AI</a:t>
+              <a:t>讓本機</a:t>
+            </a:r>
+            <a:r>
+              <a:rPr sz="5400" b="1" dirty="0">
+                <a:solidFill>
+                  <a:srgbClr val="FFFFFF"/>
+                </a:solidFill>
+                <a:latin typeface="Microsoft JhengHei"/>
+                <a:ea typeface="Microsoft JhengHei"/>
+                <a:cs typeface="Microsoft JhengHei"/>
+              </a:rPr>
+              <a:t> AI</a:t>
             </a:r>
           </a:p>
           <a:p>
@@ -7742,7 +7753,7 @@
               </a:defRPr>
             </a:pPr>
             <a:r>
-              <a:rPr sz="3900" b="1">
+              <a:rPr sz="5400" b="1" dirty="0" err="1">
                 <a:solidFill>
                   <a:srgbClr val="FFFFFF"/>
                 </a:solidFill>
@@ -7752,6 +7763,14 @@
               </a:rPr>
               <a:t>能依自己的文件回答</a:t>
             </a:r>
+            <a:endParaRPr sz="5400" b="1" dirty="0">
+              <a:solidFill>
+                <a:srgbClr val="FFFFFF"/>
+              </a:solidFill>
+              <a:latin typeface="Microsoft JhengHei"/>
+              <a:ea typeface="Microsoft JhengHei"/>
+              <a:cs typeface="Microsoft JhengHei"/>
+            </a:endParaRPr>
           </a:p>
         </p:txBody>
       </p:sp>
@@ -7800,7 +7819,7 @@
               </a:defRPr>
             </a:pPr>
             <a:r>
-              <a:rPr sz="1800" b="0">
+              <a:rPr sz="2400" b="0" dirty="0" err="1">
                 <a:solidFill>
                   <a:srgbClr val="C8C8C8"/>
                 </a:solidFill>
@@ -7810,6 +7829,14 @@
               </a:rPr>
               <a:t>完成後，能建立個人知識庫、查核來源，並維護與備份資料</a:t>
             </a:r>
+            <a:endParaRPr sz="2400" b="0" dirty="0">
+              <a:solidFill>
+                <a:srgbClr val="C8C8C8"/>
+              </a:solidFill>
+              <a:latin typeface="Microsoft JhengHei"/>
+              <a:ea typeface="Microsoft JhengHei"/>
+              <a:cs typeface="Microsoft JhengHei"/>
+            </a:endParaRPr>
           </a:p>
         </p:txBody>
       </p:sp>
@@ -14123,64 +14150,6 @@
       </p:sp>
       <p:sp>
         <p:nvSpPr>
-          <p:cNvPr id="2" name="矩形 1">
-            <a:extLst>
-              <a:ext uri="{FF2B5EF4-FFF2-40B4-BE49-F238E27FC236}">
-                <a16:creationId xmlns:a16="http://schemas.microsoft.com/office/drawing/2014/main" id="{980D9B24-64BD-498A-A8EB-B94667E9D3CD}"/>
-              </a:ext>
-            </a:extLst>
-          </p:cNvPr>
-          <p:cNvSpPr>
-            <a:spLocks noGrp="1"/>
-          </p:cNvSpPr>
-          <p:nvPr/>
-        </p:nvSpPr>
-        <p:spPr>
-          <a:xfrm>
-            <a:off x="400050" y="1104900"/>
-            <a:ext cx="8096250" cy="342900"/>
-          </a:xfrm>
-          <a:prstGeom prst="rect">
-            <a:avLst/>
-          </a:prstGeom>
-          <a:noFill/>
-          <a:ln w="0">
-            <a:noFill/>
-          </a:ln>
-        </p:spPr>
-        <p:txBody>
-          <a:bodyPr wrap="square" lIns="0" tIns="0" rIns="0" bIns="0" anchor="ctr">
-            <a:normAutofit/>
-          </a:bodyPr>
-          <a:lstStyle/>
-          <a:p>
-            <a:pPr algn="l">
-              <a:buNone/>
-              <a:defRPr sz="1500" b="0">
-                <a:solidFill>
-                  <a:srgbClr val="8E8E8E"/>
-                </a:solidFill>
-                <a:latin typeface="Microsoft JhengHei"/>
-                <a:ea typeface="Microsoft JhengHei"/>
-                <a:cs typeface="Microsoft JhengHei"/>
-              </a:defRPr>
-            </a:pPr>
-            <a:r>
-              <a:rPr sz="1500" b="0">
-                <a:solidFill>
-                  <a:srgbClr val="8E8E8E"/>
-                </a:solidFill>
-                <a:latin typeface="Microsoft JhengHei"/>
-                <a:ea typeface="Microsoft JhengHei"/>
-                <a:cs typeface="Microsoft JhengHei"/>
-              </a:rPr>
-              <a:t>不強制分段停下，依序完成即可</a:t>
-            </a:r>
-          </a:p>
-        </p:txBody>
-      </p:sp>
-      <p:sp>
-        <p:nvSpPr>
           <p:cNvPr id="3" name="矩形 2">
             <a:extLst>
               <a:ext uri="{FF2B5EF4-FFF2-40B4-BE49-F238E27FC236}">
@@ -14266,7 +14235,7 @@
         </p:spPr>
         <p:txBody>
           <a:bodyPr wrap="square" lIns="0" tIns="0" rIns="0" bIns="0" anchor="ctr">
-            <a:normAutofit/>
+            <a:noAutofit/>
           </a:bodyPr>
           <a:lstStyle/>
           <a:p>
@@ -14282,7 +14251,7 @@
               </a:defRPr>
             </a:pPr>
             <a:r>
-              <a:rPr sz="1950" b="1">
+              <a:rPr sz="2800" b="1">
                 <a:solidFill>
                   <a:srgbClr val="FFFFFF"/>
                 </a:solidFill>
@@ -14311,20 +14280,20 @@
         </p:nvSpPr>
         <p:spPr>
           <a:xfrm>
-            <a:off x="1447800" y="2552700"/>
-            <a:ext cx="2667000" cy="323850"/>
-          </a:xfrm>
-          <a:prstGeom prst="rect">
-            <a:avLst/>
-          </a:prstGeom>
-          <a:noFill/>
-          <a:ln w="0">
-            <a:noFill/>
-          </a:ln>
-        </p:spPr>
-        <p:txBody>
-          <a:bodyPr wrap="square" lIns="0" tIns="0" rIns="0" bIns="0" anchor="ctr">
-            <a:normAutofit/>
+            <a:off x="1447800" y="2599082"/>
+            <a:ext cx="2952750" cy="323850"/>
+          </a:xfrm>
+          <a:prstGeom prst="rect">
+            <a:avLst/>
+          </a:prstGeom>
+          <a:noFill/>
+          <a:ln w="0">
+            <a:noFill/>
+          </a:ln>
+        </p:spPr>
+        <p:txBody>
+          <a:bodyPr wrap="square" lIns="0" tIns="0" rIns="0" bIns="0" anchor="ctr">
+            <a:noAutofit/>
           </a:bodyPr>
           <a:lstStyle/>
           <a:p>
@@ -14340,7 +14309,7 @@
               </a:defRPr>
             </a:pPr>
             <a:r>
-              <a:rPr sz="1275" b="0">
+              <a:rPr sz="2000" b="0" dirty="0" err="1">
                 <a:solidFill>
                   <a:srgbClr val="8E8E8E"/>
                 </a:solidFill>
@@ -14348,7 +14317,18 @@
                 <a:ea typeface="Microsoft JhengHei"/>
                 <a:cs typeface="Microsoft JhengHei"/>
               </a:rPr>
-              <a:t>文件、索引與 Knowledge</a:t>
+              <a:t>文件、索引與</a:t>
+            </a:r>
+            <a:r>
+              <a:rPr sz="2000" b="0" dirty="0">
+                <a:solidFill>
+                  <a:srgbClr val="8E8E8E"/>
+                </a:solidFill>
+                <a:latin typeface="Microsoft JhengHei"/>
+                <a:ea typeface="Microsoft JhengHei"/>
+                <a:cs typeface="Microsoft JhengHei"/>
+              </a:rPr>
+              <a:t> Knowledge</a:t>
             </a:r>
           </a:p>
         </p:txBody>
@@ -14440,7 +14420,7 @@
         </p:spPr>
         <p:txBody>
           <a:bodyPr wrap="square" lIns="0" tIns="0" rIns="0" bIns="0" anchor="ctr">
-            <a:normAutofit/>
+            <a:noAutofit/>
           </a:bodyPr>
           <a:lstStyle/>
           <a:p>
@@ -14456,7 +14436,7 @@
               </a:defRPr>
             </a:pPr>
             <a:r>
-              <a:rPr sz="1950" b="1">
+              <a:rPr sz="2800" b="1">
                 <a:solidFill>
                   <a:srgbClr val="FFFFFF"/>
                 </a:solidFill>
@@ -14485,7 +14465,7 @@
         </p:nvSpPr>
         <p:spPr>
           <a:xfrm>
-            <a:off x="5353050" y="2552700"/>
+            <a:off x="5353050" y="2599082"/>
             <a:ext cx="2667000" cy="323850"/>
           </a:xfrm>
           <a:prstGeom prst="rect">
@@ -14514,7 +14494,7 @@
               </a:defRPr>
             </a:pPr>
             <a:r>
-              <a:rPr sz="1275" b="0">
+              <a:rPr sz="2000" b="0">
                 <a:solidFill>
                   <a:srgbClr val="8E8E8E"/>
                 </a:solidFill>
@@ -14614,7 +14594,7 @@
         </p:spPr>
         <p:txBody>
           <a:bodyPr wrap="square" lIns="0" tIns="0" rIns="0" bIns="0" anchor="ctr">
-            <a:normAutofit/>
+            <a:noAutofit/>
           </a:bodyPr>
           <a:lstStyle/>
           <a:p>
@@ -14630,7 +14610,7 @@
               </a:defRPr>
             </a:pPr>
             <a:r>
-              <a:rPr sz="1950" b="1">
+              <a:rPr sz="2800" b="1">
                 <a:solidFill>
                   <a:srgbClr val="FFFFFF"/>
                 </a:solidFill>
@@ -14659,7 +14639,7 @@
         </p:nvSpPr>
         <p:spPr>
           <a:xfrm>
-            <a:off x="9258300" y="2552700"/>
+            <a:off x="9258300" y="2599082"/>
             <a:ext cx="2667000" cy="323850"/>
           </a:xfrm>
           <a:prstGeom prst="rect">
@@ -14688,7 +14668,7 @@
               </a:defRPr>
             </a:pPr>
             <a:r>
-              <a:rPr sz="1275" b="0">
+              <a:rPr sz="2000" b="0">
                 <a:solidFill>
                   <a:srgbClr val="8E8E8E"/>
                 </a:solidFill>
@@ -14788,7 +14768,7 @@
         </p:spPr>
         <p:txBody>
           <a:bodyPr wrap="square" lIns="0" tIns="0" rIns="0" bIns="0" anchor="ctr">
-            <a:normAutofit/>
+            <a:noAutofit/>
           </a:bodyPr>
           <a:lstStyle/>
           <a:p>
@@ -14804,7 +14784,7 @@
               </a:defRPr>
             </a:pPr>
             <a:r>
-              <a:rPr sz="1950" b="1">
+              <a:rPr sz="2800" b="1">
                 <a:solidFill>
                   <a:srgbClr val="FFFFFF"/>
                 </a:solidFill>
@@ -14833,20 +14813,20 @@
         </p:nvSpPr>
         <p:spPr>
           <a:xfrm>
-            <a:off x="3400425" y="4505325"/>
-            <a:ext cx="2667000" cy="323850"/>
-          </a:xfrm>
-          <a:prstGeom prst="rect">
-            <a:avLst/>
-          </a:prstGeom>
-          <a:noFill/>
-          <a:ln w="0">
-            <a:noFill/>
-          </a:ln>
-        </p:spPr>
-        <p:txBody>
-          <a:bodyPr wrap="square" lIns="0" tIns="0" rIns="0" bIns="0" anchor="ctr">
-            <a:normAutofit/>
+            <a:off x="3400425" y="4551707"/>
+            <a:ext cx="2819400" cy="323850"/>
+          </a:xfrm>
+          <a:prstGeom prst="rect">
+            <a:avLst/>
+          </a:prstGeom>
+          <a:noFill/>
+          <a:ln w="0">
+            <a:noFill/>
+          </a:ln>
+        </p:spPr>
+        <p:txBody>
+          <a:bodyPr wrap="square" lIns="0" tIns="0" rIns="0" bIns="0" anchor="ctr">
+            <a:noAutofit/>
           </a:bodyPr>
           <a:lstStyle/>
           <a:p>
@@ -14862,7 +14842,7 @@
               </a:defRPr>
             </a:pPr>
             <a:r>
-              <a:rPr sz="1275" b="0">
+              <a:rPr sz="2000" b="0" dirty="0" err="1">
                 <a:solidFill>
                   <a:srgbClr val="8E8E8E"/>
                 </a:solidFill>
@@ -14872,6 +14852,14 @@
               </a:rPr>
               <a:t>停止、備份、還原與移除</a:t>
             </a:r>
+            <a:endParaRPr sz="2000" b="0" dirty="0">
+              <a:solidFill>
+                <a:srgbClr val="8E8E8E"/>
+              </a:solidFill>
+              <a:latin typeface="Microsoft JhengHei"/>
+              <a:ea typeface="Microsoft JhengHei"/>
+              <a:cs typeface="Microsoft JhengHei"/>
+            </a:endParaRPr>
           </a:p>
         </p:txBody>
       </p:sp>
@@ -14962,7 +14950,7 @@
         </p:spPr>
         <p:txBody>
           <a:bodyPr wrap="square" lIns="0" tIns="0" rIns="0" bIns="0" anchor="ctr">
-            <a:normAutofit/>
+            <a:noAutofit/>
           </a:bodyPr>
           <a:lstStyle/>
           <a:p>
@@ -14978,7 +14966,7 @@
               </a:defRPr>
             </a:pPr>
             <a:r>
-              <a:rPr sz="1950" b="1">
+              <a:rPr sz="2800" b="1">
                 <a:solidFill>
                   <a:srgbClr val="FFFFFF"/>
                 </a:solidFill>
@@ -15007,7 +14995,7 @@
         </p:nvSpPr>
         <p:spPr>
           <a:xfrm>
-            <a:off x="7305675" y="4505325"/>
+            <a:off x="7305675" y="4551707"/>
             <a:ext cx="2667000" cy="323850"/>
           </a:xfrm>
           <a:prstGeom prst="rect">
@@ -15036,7 +15024,7 @@
               </a:defRPr>
             </a:pPr>
             <a:r>
-              <a:rPr sz="1275" b="0">
+              <a:rPr sz="2000" b="0">
                 <a:solidFill>
                   <a:srgbClr val="8E8E8E"/>
                 </a:solidFill>
@@ -19296,7 +19284,7 @@
               </a:defRPr>
             </a:pPr>
             <a:r>
-              <a:rPr sz="2400" b="1">
+              <a:rPr sz="2400" b="1" dirty="0" err="1">
                 <a:solidFill>
                   <a:srgbClr val="FFFFFF"/>
                 </a:solidFill>
@@ -19306,6 +19294,14 @@
               </a:rPr>
               <a:t>建立備份前測試對話</a:t>
             </a:r>
+            <a:endParaRPr sz="2400" b="1" dirty="0">
+              <a:solidFill>
+                <a:srgbClr val="FFFFFF"/>
+              </a:solidFill>
+              <a:latin typeface="Microsoft JhengHei"/>
+              <a:ea typeface="Microsoft JhengHei"/>
+              <a:cs typeface="Microsoft JhengHei"/>
+            </a:endParaRPr>
           </a:p>
         </p:txBody>
       </p:sp>
@@ -19354,7 +19350,7 @@
               </a:defRPr>
             </a:pPr>
             <a:r>
-              <a:rPr sz="2000" b="0">
+              <a:rPr sz="2000" b="0" dirty="0" err="1">
                 <a:solidFill>
                   <a:srgbClr val="C8C8C8"/>
                 </a:solidFill>
@@ -19364,6 +19360,14 @@
               </a:rPr>
               <a:t>確認對話已出現在側邊欄</a:t>
             </a:r>
+            <a:endParaRPr sz="2000" b="0" dirty="0">
+              <a:solidFill>
+                <a:srgbClr val="C8C8C8"/>
+              </a:solidFill>
+              <a:latin typeface="Microsoft JhengHei"/>
+              <a:ea typeface="Microsoft JhengHei"/>
+              <a:cs typeface="Microsoft JhengHei"/>
+            </a:endParaRPr>
           </a:p>
         </p:txBody>
       </p:sp>
@@ -20032,7 +20036,7 @@
                 <a:ea typeface="Microsoft JhengHei"/>
                 <a:cs typeface="Microsoft JhengHei"/>
               </a:rPr>
-              <a:t>備份預設位於 Documents\Local-AI-Backups</a:t>
+              <a:t>專案外備份：Local-AI-Backups\OpenWebUI-日期_時間</a:t>
             </a:r>
           </a:p>
         </p:txBody>
@@ -20449,7 +20453,7 @@
               </a:defRPr>
             </a:pPr>
             <a:r>
-              <a:rPr sz="2000" b="0">
+              <a:rPr sz="2000" b="0" dirty="0" err="1">
                 <a:solidFill>
                   <a:srgbClr val="C8C8C8"/>
                 </a:solidFill>
@@ -20459,6 +20463,14 @@
               </a:rPr>
               <a:t>原有帳號可登入</a:t>
             </a:r>
+            <a:endParaRPr sz="2000" b="0" dirty="0">
+              <a:solidFill>
+                <a:srgbClr val="C8C8C8"/>
+              </a:solidFill>
+              <a:latin typeface="Microsoft JhengHei"/>
+              <a:ea typeface="Microsoft JhengHei"/>
+              <a:cs typeface="Microsoft JhengHei"/>
+            </a:endParaRPr>
           </a:p>
           <a:p>
             <a:pPr marL="342900" indent="-342900" algn="l">
@@ -20477,7 +20489,7 @@
               </a:defRPr>
             </a:pPr>
             <a:r>
-              <a:rPr sz="2000" b="0">
+              <a:rPr sz="2000" b="0" dirty="0" err="1">
                 <a:solidFill>
                   <a:srgbClr val="C8C8C8"/>
                 </a:solidFill>
@@ -20487,6 +20499,14 @@
               </a:rPr>
               <a:t>備份前測試對話存在</a:t>
             </a:r>
+            <a:endParaRPr sz="2000" b="0" dirty="0">
+              <a:solidFill>
+                <a:srgbClr val="C8C8C8"/>
+              </a:solidFill>
+              <a:latin typeface="Microsoft JhengHei"/>
+              <a:ea typeface="Microsoft JhengHei"/>
+              <a:cs typeface="Microsoft JhengHei"/>
+            </a:endParaRPr>
           </a:p>
           <a:p>
             <a:pPr marL="342900" indent="-342900" algn="l">
@@ -20505,7 +20525,7 @@
               </a:defRPr>
             </a:pPr>
             <a:r>
-              <a:rPr sz="2000" b="0">
+              <a:rPr sz="2000" b="0" dirty="0" err="1">
                 <a:solidFill>
                   <a:srgbClr val="C8C8C8"/>
                 </a:solidFill>
@@ -20515,6 +20535,14 @@
               </a:rPr>
               <a:t>知識庫與文件仍可使用</a:t>
             </a:r>
+            <a:endParaRPr sz="2000" b="0" dirty="0">
+              <a:solidFill>
+                <a:srgbClr val="C8C8C8"/>
+              </a:solidFill>
+              <a:latin typeface="Microsoft JhengHei"/>
+              <a:ea typeface="Microsoft JhengHei"/>
+              <a:cs typeface="Microsoft JhengHei"/>
+            </a:endParaRPr>
           </a:p>
         </p:txBody>
       </p:sp>
@@ -21160,7 +21188,7 @@
               </a:defRPr>
             </a:pPr>
             <a:r>
-              <a:rPr sz="1950" b="1">
+              <a:rPr sz="2400" b="1" dirty="0" err="1">
                 <a:solidFill>
                   <a:srgbClr val="FFFFFF"/>
                 </a:solidFill>
@@ -21168,7 +21196,18 @@
                 <a:ea typeface="Microsoft JhengHei"/>
                 <a:cs typeface="Microsoft JhengHei"/>
               </a:rPr>
-              <a:t>啟動 Docker Desktop</a:t>
+              <a:t>啟動</a:t>
+            </a:r>
+            <a:r>
+              <a:rPr sz="2400" b="1" dirty="0">
+                <a:solidFill>
+                  <a:srgbClr val="FFFFFF"/>
+                </a:solidFill>
+                <a:latin typeface="Microsoft JhengHei"/>
+                <a:ea typeface="Microsoft JhengHei"/>
+                <a:cs typeface="Microsoft JhengHei"/>
+              </a:rPr>
+              <a:t> Docker Desktop</a:t>
             </a:r>
           </a:p>
         </p:txBody>
@@ -21218,7 +21257,7 @@
               </a:defRPr>
             </a:pPr>
             <a:r>
-              <a:rPr sz="1350" b="0">
+              <a:rPr sz="2000" b="0" dirty="0" err="1">
                 <a:solidFill>
                   <a:srgbClr val="C8C8C8"/>
                 </a:solidFill>
@@ -21226,7 +21265,18 @@
                 <a:ea typeface="Microsoft JhengHei"/>
                 <a:cs typeface="Microsoft JhengHei"/>
               </a:rPr>
-              <a:t>等待 Engine running</a:t>
+              <a:t>等待</a:t>
+            </a:r>
+            <a:r>
+              <a:rPr sz="2000" b="0" dirty="0">
+                <a:solidFill>
+                  <a:srgbClr val="C8C8C8"/>
+                </a:solidFill>
+                <a:latin typeface="Microsoft JhengHei"/>
+                <a:ea typeface="Microsoft JhengHei"/>
+                <a:cs typeface="Microsoft JhengHei"/>
+              </a:rPr>
+              <a:t> Engine running</a:t>
             </a:r>
           </a:p>
         </p:txBody>
@@ -21364,7 +21414,7 @@
               </a:defRPr>
             </a:pPr>
             <a:r>
-              <a:rPr sz="1950" b="1">
+              <a:rPr sz="2400" b="1">
                 <a:solidFill>
                   <a:srgbClr val="FFFFFF"/>
                 </a:solidFill>
@@ -21422,7 +21472,7 @@
               </a:defRPr>
             </a:pPr>
             <a:r>
-              <a:rPr sz="1350" b="0">
+              <a:rPr sz="2000" b="0">
                 <a:solidFill>
                   <a:srgbClr val="C8C8C8"/>
                 </a:solidFill>
@@ -21568,7 +21618,7 @@
               </a:defRPr>
             </a:pPr>
             <a:r>
-              <a:rPr sz="1950" b="1">
+              <a:rPr sz="2400" b="1">
                 <a:solidFill>
                   <a:srgbClr val="FFFFFF"/>
                 </a:solidFill>
@@ -21626,7 +21676,7 @@
               </a:defRPr>
             </a:pPr>
             <a:r>
-              <a:rPr sz="1350" b="0">
+              <a:rPr sz="2000" b="0">
                 <a:solidFill>
                   <a:srgbClr val="C8C8C8"/>
                 </a:solidFill>
@@ -21772,7 +21822,7 @@
               </a:defRPr>
             </a:pPr>
             <a:r>
-              <a:rPr sz="1950" b="1">
+              <a:rPr sz="2400" b="1">
                 <a:solidFill>
                   <a:srgbClr val="FFFFFF"/>
                 </a:solidFill>
@@ -21830,7 +21880,7 @@
               </a:defRPr>
             </a:pPr>
             <a:r>
-              <a:rPr sz="1350" b="0">
+              <a:rPr sz="2000" b="0">
                 <a:solidFill>
                   <a:srgbClr val="C8C8C8"/>
                 </a:solidFill>
@@ -23360,7 +23410,7 @@
               </a:defRPr>
             </a:pPr>
             <a:r>
-              <a:rPr sz="1575" dirty="0" err="1">
+              <a:rPr sz="2000" dirty="0" err="1">
                 <a:solidFill>
                   <a:srgbClr val="C8C8C8"/>
                 </a:solidFill>
@@ -23370,7 +23420,7 @@
               </a:rPr>
               <a:t>記錄來源檔名與原文片段</a:t>
             </a:r>
-            <a:endParaRPr sz="1575" dirty="0">
+            <a:endParaRPr sz="2000" dirty="0">
               <a:solidFill>
                 <a:srgbClr val="C8C8C8"/>
               </a:solidFill>
@@ -23395,7 +23445,7 @@
               </a:defRPr>
             </a:pPr>
             <a:r>
-              <a:rPr sz="1575" dirty="0" err="1">
+              <a:rPr sz="2000" dirty="0" err="1">
                 <a:solidFill>
                   <a:srgbClr val="C8C8C8"/>
                 </a:solidFill>
@@ -23405,7 +23455,7 @@
               </a:rPr>
               <a:t>判定支持程度</a:t>
             </a:r>
-            <a:endParaRPr sz="1575" dirty="0">
+            <a:endParaRPr sz="2000" dirty="0">
               <a:solidFill>
                 <a:srgbClr val="C8C8C8"/>
               </a:solidFill>
@@ -23430,7 +23480,7 @@
               </a:defRPr>
             </a:pPr>
             <a:r>
-              <a:rPr sz="1575" dirty="0" err="1">
+              <a:rPr sz="2000" dirty="0" err="1">
                 <a:solidFill>
                   <a:srgbClr val="C8C8C8"/>
                 </a:solidFill>
@@ -23440,7 +23490,7 @@
               </a:rPr>
               <a:t>不支持就修改問題後重問</a:t>
             </a:r>
-            <a:endParaRPr sz="1575" dirty="0">
+            <a:endParaRPr sz="2000" dirty="0">
               <a:solidFill>
                 <a:srgbClr val="C8C8C8"/>
               </a:solidFill>
@@ -23650,7 +23700,7 @@
               </a:defRPr>
             </a:pPr>
             <a:r>
-              <a:rPr sz="1575">
+              <a:rPr sz="2000">
                 <a:solidFill>
                   <a:srgbClr val="C8C8C8"/>
                 </a:solidFill>
@@ -23677,7 +23727,7 @@
               </a:defRPr>
             </a:pPr>
             <a:r>
-              <a:rPr sz="1575">
+              <a:rPr sz="2000">
                 <a:solidFill>
                   <a:srgbClr val="C8C8C8"/>
                 </a:solidFill>
@@ -23704,7 +23754,7 @@
               </a:defRPr>
             </a:pPr>
             <a:r>
-              <a:rPr sz="1575">
+              <a:rPr sz="2000">
                 <a:solidFill>
                   <a:srgbClr val="C8C8C8"/>
                 </a:solidFill>
@@ -24090,7 +24140,7 @@
               </a:defRPr>
             </a:pPr>
             <a:r>
-              <a:rPr sz="3600" b="1" dirty="0" err="1">
+              <a:rPr sz="3600" b="1">
                 <a:solidFill>
                   <a:srgbClr val="8E8E8E"/>
                 </a:solidFill>
@@ -24100,14 +24150,6 @@
               </a:rPr>
               <a:t>已完成</a:t>
             </a:r>
-            <a:endParaRPr sz="3600" b="1" dirty="0">
-              <a:solidFill>
-                <a:srgbClr val="8E8E8E"/>
-              </a:solidFill>
-              <a:latin typeface="Microsoft JhengHei"/>
-              <a:ea typeface="Microsoft JhengHei"/>
-              <a:cs typeface="Microsoft JhengHei"/>
-            </a:endParaRPr>
           </a:p>
         </p:txBody>
       </p:sp>
@@ -24127,20 +24169,20 @@
         </p:nvSpPr>
         <p:spPr>
           <a:xfrm>
-            <a:off x="3773778" y="2315918"/>
-            <a:ext cx="4644444" cy="1809750"/>
-          </a:xfrm>
-          <a:prstGeom prst="rect">
-            <a:avLst/>
-          </a:prstGeom>
-          <a:noFill/>
-          <a:ln w="0">
-            <a:noFill/>
-          </a:ln>
-        </p:spPr>
-        <p:txBody>
-          <a:bodyPr wrap="square" lIns="0" tIns="0" rIns="0" bIns="0" anchor="ctr">
-            <a:normAutofit/>
+            <a:off x="3599732" y="2376488"/>
+            <a:ext cx="4992535" cy="1809750"/>
+          </a:xfrm>
+          <a:prstGeom prst="rect">
+            <a:avLst/>
+          </a:prstGeom>
+          <a:noFill/>
+          <a:ln w="0">
+            <a:noFill/>
+          </a:ln>
+        </p:spPr>
+        <p:txBody>
+          <a:bodyPr wrap="square" lIns="0" tIns="0" rIns="0" bIns="0" anchor="ctr">
+            <a:noAutofit/>
           </a:bodyPr>
           <a:lstStyle/>
           <a:p>
@@ -24148,7 +24190,7 @@
               <a:lnSpc>
                 <a:spcPct val="150000"/>
               </a:lnSpc>
-              <a:buFont typeface="Arial" panose="020B0604020202020204" pitchFamily="34" charset="0"/>
+              <a:buFont typeface="Arial"/>
               <a:buChar char="•"/>
               <a:defRPr sz="1875" b="0">
                 <a:solidFill>
@@ -24160,7 +24202,7 @@
               </a:defRPr>
             </a:pPr>
             <a:r>
-              <a:rPr sz="1875" b="0" dirty="0" err="1">
+              <a:rPr sz="2000" b="0" dirty="0" err="1">
                 <a:solidFill>
                   <a:srgbClr val="FFFFFF"/>
                 </a:solidFill>
@@ -24170,7 +24212,7 @@
               </a:rPr>
               <a:t>建立可重複使用的個人知識庫</a:t>
             </a:r>
-            <a:endParaRPr sz="1875" b="0" dirty="0">
+            <a:endParaRPr sz="2000" b="0" dirty="0">
               <a:solidFill>
                 <a:srgbClr val="FFFFFF"/>
               </a:solidFill>
@@ -24184,7 +24226,7 @@
               <a:lnSpc>
                 <a:spcPct val="150000"/>
               </a:lnSpc>
-              <a:buFont typeface="Arial" panose="020B0604020202020204" pitchFamily="34" charset="0"/>
+              <a:buFont typeface="Arial"/>
               <a:buChar char="•"/>
               <a:defRPr sz="1875" b="0">
                 <a:solidFill>
@@ -24196,7 +24238,7 @@
               </a:defRPr>
             </a:pPr>
             <a:r>
-              <a:rPr sz="1875" b="0" dirty="0" err="1">
+              <a:rPr sz="2000" b="0" dirty="0" err="1">
                 <a:solidFill>
                   <a:srgbClr val="FFFFFF"/>
                 </a:solidFill>
@@ -24207,7 +24249,7 @@
               <a:t>比較</a:t>
             </a:r>
             <a:r>
-              <a:rPr sz="1875" b="0" dirty="0">
+              <a:rPr sz="2000" b="0" dirty="0">
                 <a:solidFill>
                   <a:srgbClr val="FFFFFF"/>
                 </a:solidFill>
@@ -24223,7 +24265,7 @@
               <a:lnSpc>
                 <a:spcPct val="150000"/>
               </a:lnSpc>
-              <a:buFont typeface="Arial" panose="020B0604020202020204" pitchFamily="34" charset="0"/>
+              <a:buFont typeface="Arial"/>
               <a:buChar char="•"/>
               <a:defRPr sz="1875" b="0">
                 <a:solidFill>
@@ -24235,7 +24277,7 @@
               </a:defRPr>
             </a:pPr>
             <a:r>
-              <a:rPr sz="1875" b="0" dirty="0" err="1">
+              <a:rPr sz="2000" b="0" dirty="0" err="1">
                 <a:solidFill>
                   <a:srgbClr val="FFFFFF"/>
                 </a:solidFill>
@@ -24245,7 +24287,7 @@
               </a:rPr>
               <a:t>依原始文件查核回答與來源</a:t>
             </a:r>
-            <a:endParaRPr sz="1875" b="0" dirty="0">
+            <a:endParaRPr sz="2000" b="0" dirty="0">
               <a:solidFill>
                 <a:srgbClr val="FFFFFF"/>
               </a:solidFill>
@@ -24259,7 +24301,7 @@
               <a:lnSpc>
                 <a:spcPct val="150000"/>
               </a:lnSpc>
-              <a:buFont typeface="Arial" panose="020B0604020202020204" pitchFamily="34" charset="0"/>
+              <a:buFont typeface="Arial"/>
               <a:buChar char="•"/>
               <a:defRPr sz="1875" b="0">
                 <a:solidFill>
@@ -24271,7 +24313,7 @@
               </a:defRPr>
             </a:pPr>
             <a:r>
-              <a:rPr sz="1875" b="0" dirty="0" err="1">
+              <a:rPr sz="2000" b="0" dirty="0" err="1">
                 <a:solidFill>
                   <a:srgbClr val="FFFFFF"/>
                 </a:solidFill>
@@ -24281,7 +24323,7 @@
               </a:rPr>
               <a:t>更新、備份、還原並完成驗收</a:t>
             </a:r>
-            <a:endParaRPr sz="1875" b="0" dirty="0">
+            <a:endParaRPr sz="2000" b="0" dirty="0">
               <a:solidFill>
                 <a:srgbClr val="FFFFFF"/>
               </a:solidFill>
@@ -26041,7 +26083,7 @@
               </a:defRPr>
             </a:pPr>
             <a:r>
-              <a:rPr sz="1800" b="0">
+              <a:rPr sz="2000" b="0" dirty="0" err="1">
                 <a:solidFill>
                   <a:srgbClr val="C8C8C8"/>
                 </a:solidFill>
@@ -26049,8 +26091,38 @@
                 <a:ea typeface="Microsoft JhengHei"/>
                 <a:cs typeface="Microsoft JhengHei"/>
               </a:rPr>
-              <a:t>單元 00～04 已完成</a:t>
-            </a:r>
+              <a:t>單元</a:t>
+            </a:r>
+            <a:r>
+              <a:rPr sz="2000" b="0" dirty="0">
+                <a:solidFill>
+                  <a:srgbClr val="C8C8C8"/>
+                </a:solidFill>
+                <a:latin typeface="Microsoft JhengHei"/>
+                <a:ea typeface="Microsoft JhengHei"/>
+                <a:cs typeface="Microsoft JhengHei"/>
+              </a:rPr>
+              <a:t> 00～04 </a:t>
+            </a:r>
+            <a:r>
+              <a:rPr sz="2000" b="0" dirty="0" err="1">
+                <a:solidFill>
+                  <a:srgbClr val="C8C8C8"/>
+                </a:solidFill>
+                <a:latin typeface="Microsoft JhengHei"/>
+                <a:ea typeface="Microsoft JhengHei"/>
+                <a:cs typeface="Microsoft JhengHei"/>
+              </a:rPr>
+              <a:t>已完成</a:t>
+            </a:r>
+            <a:endParaRPr sz="2000" b="0" dirty="0">
+              <a:solidFill>
+                <a:srgbClr val="C8C8C8"/>
+              </a:solidFill>
+              <a:latin typeface="Microsoft JhengHei"/>
+              <a:ea typeface="Microsoft JhengHei"/>
+              <a:cs typeface="Microsoft JhengHei"/>
+            </a:endParaRPr>
           </a:p>
           <a:p>
             <a:pPr marL="285750" indent="-285750" algn="l">
@@ -26069,7 +26141,7 @@
               </a:defRPr>
             </a:pPr>
             <a:r>
-              <a:rPr sz="1800" b="0">
+              <a:rPr sz="2000" b="0" dirty="0" err="1">
                 <a:solidFill>
                   <a:srgbClr val="C8C8C8"/>
                 </a:solidFill>
@@ -26077,8 +26149,60 @@
                 <a:ea typeface="Microsoft JhengHei"/>
                 <a:cs typeface="Microsoft JhengHei"/>
               </a:rPr>
-              <a:t>Ollama 與 Open WebUI 可啟動</a:t>
-            </a:r>
+              <a:t>Ollama</a:t>
+            </a:r>
+            <a:r>
+              <a:rPr sz="2000" b="0" dirty="0">
+                <a:solidFill>
+                  <a:srgbClr val="C8C8C8"/>
+                </a:solidFill>
+                <a:latin typeface="Microsoft JhengHei"/>
+                <a:ea typeface="Microsoft JhengHei"/>
+                <a:cs typeface="Microsoft JhengHei"/>
+              </a:rPr>
+              <a:t> 與 Open </a:t>
+            </a:r>
+            <a:r>
+              <a:rPr sz="2000" b="0" dirty="0" err="1">
+                <a:solidFill>
+                  <a:srgbClr val="C8C8C8"/>
+                </a:solidFill>
+                <a:latin typeface="Microsoft JhengHei"/>
+                <a:ea typeface="Microsoft JhengHei"/>
+                <a:cs typeface="Microsoft JhengHei"/>
+              </a:rPr>
+              <a:t>WebUI</a:t>
+            </a:r>
+            <a:r>
+              <a:rPr sz="2000" b="0" dirty="0">
+                <a:solidFill>
+                  <a:srgbClr val="C8C8C8"/>
+                </a:solidFill>
+                <a:latin typeface="Microsoft JhengHei"/>
+                <a:ea typeface="Microsoft JhengHei"/>
+                <a:cs typeface="Microsoft JhengHei"/>
+              </a:rPr>
+              <a:t> </a:t>
+            </a:r>
+            <a:r>
+              <a:rPr sz="2000" b="0" dirty="0" err="1">
+                <a:solidFill>
+                  <a:srgbClr val="C8C8C8"/>
+                </a:solidFill>
+                <a:latin typeface="Microsoft JhengHei"/>
+                <a:ea typeface="Microsoft JhengHei"/>
+                <a:cs typeface="Microsoft JhengHei"/>
+              </a:rPr>
+              <a:t>可啟動</a:t>
+            </a:r>
+            <a:endParaRPr sz="2000" b="0" dirty="0">
+              <a:solidFill>
+                <a:srgbClr val="C8C8C8"/>
+              </a:solidFill>
+              <a:latin typeface="Microsoft JhengHei"/>
+              <a:ea typeface="Microsoft JhengHei"/>
+              <a:cs typeface="Microsoft JhengHei"/>
+            </a:endParaRPr>
           </a:p>
           <a:p>
             <a:pPr marL="285750" indent="-285750" algn="l">
@@ -26097,7 +26221,7 @@
               </a:defRPr>
             </a:pPr>
             <a:r>
-              <a:rPr sz="1800" b="0">
+              <a:rPr sz="2000" b="0" dirty="0" err="1">
                 <a:solidFill>
                   <a:srgbClr val="C8C8C8"/>
                 </a:solidFill>
@@ -26107,6 +26231,14 @@
               </a:rPr>
               <a:t>對話模型已下載</a:t>
             </a:r>
+            <a:endParaRPr sz="2000" b="0" dirty="0">
+              <a:solidFill>
+                <a:srgbClr val="C8C8C8"/>
+              </a:solidFill>
+              <a:latin typeface="Microsoft JhengHei"/>
+              <a:ea typeface="Microsoft JhengHei"/>
+              <a:cs typeface="Microsoft JhengHei"/>
+            </a:endParaRPr>
           </a:p>
           <a:p>
             <a:pPr marL="285750" indent="-285750" algn="l">
@@ -26125,7 +26257,7 @@
               </a:defRPr>
             </a:pPr>
             <a:r>
-              <a:rPr sz="1800" b="0">
+              <a:rPr sz="2000" b="0" dirty="0" err="1">
                 <a:solidFill>
                   <a:srgbClr val="C8C8C8"/>
                 </a:solidFill>
@@ -26135,6 +26267,14 @@
               </a:rPr>
               <a:t>本機保留原始文件</a:t>
             </a:r>
+            <a:endParaRPr sz="2000" b="0" dirty="0">
+              <a:solidFill>
+                <a:srgbClr val="C8C8C8"/>
+              </a:solidFill>
+              <a:latin typeface="Microsoft JhengHei"/>
+              <a:ea typeface="Microsoft JhengHei"/>
+              <a:cs typeface="Microsoft JhengHei"/>
+            </a:endParaRPr>
           </a:p>
         </p:txBody>
       </p:sp>
@@ -26245,7 +26385,7 @@
               </a:defRPr>
             </a:pPr>
             <a:r>
-              <a:rPr sz="1800" b="0">
+              <a:rPr sz="2000" b="0">
                 <a:solidFill>
                   <a:srgbClr val="C8C8C8"/>
                 </a:solidFill>
@@ -26273,7 +26413,7 @@
               </a:defRPr>
             </a:pPr>
             <a:r>
-              <a:rPr sz="1800" b="0">
+              <a:rPr sz="2000" b="0">
                 <a:solidFill>
                   <a:srgbClr val="C8C8C8"/>
                 </a:solidFill>
@@ -26301,7 +26441,7 @@
               </a:defRPr>
             </a:pPr>
             <a:r>
-              <a:rPr sz="1800" b="0">
+              <a:rPr sz="2000" b="0">
                 <a:solidFill>
                   <a:srgbClr val="C8C8C8"/>
                 </a:solidFill>
@@ -26329,7 +26469,7 @@
               </a:defRPr>
             </a:pPr>
             <a:r>
-              <a:rPr sz="1800" b="0">
+              <a:rPr sz="2000" b="0">
                 <a:solidFill>
                   <a:srgbClr val="C8C8C8"/>
                 </a:solidFill>
